--- a/CardioRisk_ML/presentation/CardioRisk_ML_Presentation.pptx
+++ b/CardioRisk_ML/presentation/CardioRisk_ML_Presentation.pptx
@@ -4776,7 +4776,7 @@
                 <a:cs typeface="Calibri"/>
                 <a:sym typeface="Calibri"/>
               </a:rPr>
-              <a:t>emersonantoniods</a:t>
+              <a:t>semersonantonio</a:t>
             </a:r>
             <a:endParaRPr b="0" i="0" sz="1100" u="none" cap="none" strike="noStrike">
               <a:solidFill>
@@ -5766,7 +5766,7 @@
                 <a:cs typeface="Calibri"/>
                 <a:sym typeface="Calibri"/>
               </a:rPr>
-              <a:t>emersonantoniods</a:t>
+              <a:t>semersonantonio</a:t>
             </a:r>
             <a:r>
               <a:rPr b="0" i="0" lang="en-US" sz="1000" u="none" cap="none" strike="noStrike">
@@ -5778,7 +5778,7 @@
                 <a:cs typeface="Calibri"/>
                 <a:sym typeface="Calibri"/>
               </a:rPr>
-              <a:t> ·  Madrid, Spain</a:t>
+              <a:t xml:space="preserve"> ·  Madrid, Spain</a:t>
             </a:r>
             <a:endParaRPr b="0" i="0" sz="1000" u="none" cap="none" strike="noStrike">
               <a:solidFill>
@@ -13998,7 +13998,7 @@
                 <a:cs typeface="Consolas"/>
                 <a:sym typeface="Consolas"/>
               </a:rPr>
-              <a:t>bmi_age_interaction</a:t>
+              <a:t>age_x_diabetes</a:t>
             </a:r>
             <a:endParaRPr b="0" i="0" sz="1150" u="none" cap="none" strike="noStrike">
               <a:solidFill>
@@ -14061,7 +14061,7 @@
                 <a:cs typeface="Calibri"/>
                 <a:sym typeface="Calibri"/>
               </a:rPr>
-              <a:t>BMI × age — amplifies obesity risk as patients age; captures delayed metabolic damage</a:t>
+              <a:t>Age × diabetes flag — amplifies glycaemic risk with age; captures the compounding effect of aging in diabetic patients</a:t>
             </a:r>
             <a:endParaRPr b="0" i="0" sz="1000" u="none" cap="none" strike="noStrike">
               <a:solidFill>
@@ -14229,7 +14229,7 @@
                 <a:cs typeface="Consolas"/>
                 <a:sym typeface="Consolas"/>
               </a:rPr>
-              <a:t>glucose_diabetes</a:t>
+              <a:t>smoking_x_htn</a:t>
             </a:r>
             <a:endParaRPr b="0" i="0" sz="1150" u="none" cap="none" strike="noStrike">
               <a:solidFill>
@@ -14292,7 +14292,7 @@
                 <a:cs typeface="Calibri"/>
                 <a:sym typeface="Calibri"/>
               </a:rPr>
-              <a:t>Fasting glucose × diabetes flag — flags uncontrolled glycaemia in confirmed diabetics</a:t>
+              <a:t>Smoking severity × hypertension flag — captures the particularly atherogenic effect of smoking in hypertensive patients</a:t>
             </a:r>
             <a:endParaRPr b="0" i="0" sz="1000" u="none" cap="none" strike="noStrike">
               <a:solidFill>
@@ -14460,7 +14460,7 @@
                 <a:cs typeface="Consolas"/>
                 <a:sym typeface="Consolas"/>
               </a:rPr>
-              <a:t>bp_hypertension</a:t>
+              <a:t>abdominal_obesity</a:t>
             </a:r>
             <a:endParaRPr b="0" i="0" sz="1150" u="none" cap="none" strike="noStrike">
               <a:solidFill>
@@ -14523,7 +14523,7 @@
                 <a:cs typeface="Calibri"/>
                 <a:sym typeface="Calibri"/>
               </a:rPr>
-              <a:t>Systolic BP × hypertension flag — isolates drug-resistant or severe hypertension signal</a:t>
+              <a:t>Sex-specific waist circumference flag — ≥102 cm (men) or ≥88 cm (women), captures central obesity signal</a:t>
             </a:r>
             <a:endParaRPr b="0" i="0" sz="1000" u="none" cap="none" strike="noStrike">
               <a:solidFill>
@@ -21923,7 +21923,7 @@
                 <a:cs typeface="Calibri"/>
                 <a:sym typeface="Calibri"/>
               </a:rPr>
-              <a:t>Recall    </a:t>
+              <a:t xml:space="preserve">Recall    </a:t>
             </a:r>
             <a:r>
               <a:rPr b="0" i="0" lang="en-US" sz="1200" u="none" cap="none" strike="noStrike">
@@ -21935,7 +21935,7 @@
                 <a:cs typeface="Calibri"/>
                 <a:sym typeface="Calibri"/>
               </a:rPr>
-              <a:t>0.747     </a:t>
+              <a:t xml:space="preserve">0.747     </a:t>
             </a:r>
             <a:r>
               <a:rPr b="1" i="0" lang="en-US" sz="1200" u="none" cap="none" strike="noStrike">
@@ -21947,7 +21947,7 @@
                 <a:cs typeface="Calibri"/>
                 <a:sym typeface="Calibri"/>
               </a:rPr>
-              <a:t>Precision </a:t>
+              <a:t xml:space="preserve">Precision </a:t>
             </a:r>
             <a:r>
               <a:rPr b="0" i="0" lang="en-US" sz="1200" u="none" cap="none" strike="noStrike">
@@ -21959,7 +21959,7 @@
                 <a:cs typeface="Calibri"/>
                 <a:sym typeface="Calibri"/>
               </a:rPr>
-              <a:t>0.742     </a:t>
+              <a:t xml:space="preserve">0.742     </a:t>
             </a:r>
             <a:r>
               <a:rPr b="1" i="0" lang="en-US" sz="1200" u="none" cap="none" strike="noStrike">
@@ -21971,7 +21971,7 @@
                 <a:cs typeface="Calibri"/>
                 <a:sym typeface="Calibri"/>
               </a:rPr>
-              <a:t>F1 </a:t>
+              <a:t xml:space="preserve">F1 </a:t>
             </a:r>
             <a:r>
               <a:rPr b="0" i="0" lang="en-US" sz="1200" u="none" cap="none" strike="noStrike">
@@ -22277,7 +22277,7 @@
                 <a:cs typeface="Calibri"/>
                 <a:sym typeface="Calibri"/>
               </a:rPr>
-              <a:t>Recall    </a:t>
+              <a:t xml:space="preserve">Recall    </a:t>
             </a:r>
             <a:r>
               <a:rPr b="0" i="0" lang="en-US" sz="1200" u="none" cap="none" strike="noStrike">
@@ -22289,7 +22289,7 @@
                 <a:cs typeface="Calibri"/>
                 <a:sym typeface="Calibri"/>
               </a:rPr>
-              <a:t>0.863     </a:t>
+              <a:t xml:space="preserve">0.863     </a:t>
             </a:r>
             <a:r>
               <a:rPr b="1" i="0" lang="en-US" sz="1200" u="none" cap="none" strike="noStrike">
@@ -22301,7 +22301,7 @@
                 <a:cs typeface="Calibri"/>
                 <a:sym typeface="Calibri"/>
               </a:rPr>
-              <a:t>Precision </a:t>
+              <a:t xml:space="preserve">Precision </a:t>
             </a:r>
             <a:r>
               <a:rPr b="0" i="0" lang="en-US" sz="1200" u="none" cap="none" strike="noStrike">
@@ -22313,7 +22313,7 @@
                 <a:cs typeface="Calibri"/>
                 <a:sym typeface="Calibri"/>
               </a:rPr>
-              <a:t>0.650     </a:t>
+              <a:t xml:space="preserve">0.650     </a:t>
             </a:r>
             <a:r>
               <a:rPr b="1" i="0" lang="en-US" sz="1200" u="none" cap="none" strike="noStrike">
@@ -22325,7 +22325,7 @@
                 <a:cs typeface="Calibri"/>
                 <a:sym typeface="Calibri"/>
               </a:rPr>
-              <a:t>F1 </a:t>
+              <a:t xml:space="preserve">F1 </a:t>
             </a:r>
             <a:r>
               <a:rPr b="0" i="0" lang="en-US" sz="1200" u="none" cap="none" strike="noStrike">
